--- a/videos/machine-learning/03_ridger_regression_gradient_descent/recreated_pptx/slide_021_recreated.pptx
+++ b/videos/machine-learning/03_ridger_regression_gradient_descent/recreated_pptx/slide_021_recreated.pptx
@@ -884,7 +884,7 @@
         <p:spPr>
           <a:xfrm>
             <a:off x="685800" y="571500"/>
-            <a:ext cx="10795000" cy="6286500"/>
+            <a:ext cx="10782300" cy="6286500"/>
           </a:xfrm>
           <a:prstGeom prst="rect">
             <a:avLst/>
@@ -903,19 +903,16 @@
         </p:nvSpPr>
         <p:spPr>
           <a:xfrm>
-            <a:off x="742950" y="584200"/>
-            <a:ext cx="0" cy="6261100"/>
+            <a:off x="742950" y="571500"/>
+            <a:ext cx="12700" cy="6286500"/>
           </a:xfrm>
-          <a:prstGeom prst="line">
+          <a:prstGeom prst="rect">
             <a:avLst/>
           </a:prstGeom>
-          <a:noFill/>
-          <a:ln w="12700">
-            <a:solidFill>
-              <a:srgbClr val="C00000"/>
-            </a:solidFill>
-            <a:prstDash val="solid"/>
-          </a:ln>
+          <a:solidFill>
+            <a:srgbClr val="C00000"/>
+          </a:solidFill>
+          <a:ln/>
         </p:spPr>
       </p:sp>
       <p:sp>
@@ -926,19 +923,16 @@
         </p:nvSpPr>
         <p:spPr>
           <a:xfrm>
-            <a:off x="11442700" y="584200"/>
-            <a:ext cx="0" cy="6261100"/>
+            <a:off x="11442700" y="571500"/>
+            <a:ext cx="12700" cy="6286500"/>
           </a:xfrm>
-          <a:prstGeom prst="line">
+          <a:prstGeom prst="rect">
             <a:avLst/>
           </a:prstGeom>
-          <a:noFill/>
-          <a:ln w="12700">
-            <a:solidFill>
-              <a:srgbClr val="C00000"/>
-            </a:solidFill>
-            <a:prstDash val="solid"/>
-          </a:ln>
+          <a:solidFill>
+            <a:srgbClr val="C00000"/>
+          </a:solidFill>
+          <a:ln/>
         </p:spPr>
       </p:sp>
       <p:sp>
@@ -949,19 +943,16 @@
         </p:nvSpPr>
         <p:spPr>
           <a:xfrm>
-            <a:off x="736600" y="6838950"/>
-            <a:ext cx="10718800" cy="0"/>
+            <a:off x="685800" y="6838950"/>
+            <a:ext cx="10782300" cy="12700"/>
           </a:xfrm>
-          <a:prstGeom prst="line">
+          <a:prstGeom prst="rect">
             <a:avLst/>
           </a:prstGeom>
-          <a:noFill/>
-          <a:ln w="12700">
-            <a:solidFill>
-              <a:srgbClr val="C00000"/>
-            </a:solidFill>
-            <a:prstDash val="solid"/>
-          </a:ln>
+          <a:solidFill>
+            <a:srgbClr val="C00000"/>
+          </a:solidFill>
+          <a:ln/>
         </p:spPr>
       </p:sp>
       <p:sp>
@@ -981,7 +972,7 @@
           <a:solidFill>
             <a:srgbClr val="FDFD96"/>
           </a:solidFill>
-          <a:ln w="25400">
+          <a:ln w="12700">
             <a:solidFill>
               <a:srgbClr val="6A5ACD"/>
             </a:solidFill>
@@ -1198,7 +1189,7 @@
       </p:sp>
       <p:pic>
         <p:nvPicPr>
-          <p:cNvPr id="15" name="Image 0" descr="/workspaces/codespaces-blank/ai_llm_slides/videos/machine-learning/03_ridger_regression_gradient_descent/recreated_pptx/build/assets/eq_021_xtx.png">    </p:cNvPr>
+          <p:cNvPr id="15" name="Image 0" descr="/home/ahmed/Projects/ai_llm_slides/videos/machine-learning/03_ridger_regression_gradient_descent/recreated_pptx/build/assets/eq_021_xtx.png">    </p:cNvPr>
           <p:cNvPicPr>
             <a:picLocks noChangeAspect="1"/>
           </p:cNvPicPr>
@@ -1275,11 +1266,23 @@
                     </a:p>
                   </a:txBody>
                   <a:tcPr marL="0" marR="0" marT="0" marB="0" anchor="ctr">
-                    <a:lnL w="0" cap="flat" cmpd="sng" algn="ctr">
-                      <a:noFill/>
+                    <a:lnL w="12700" cap="flat" cmpd="sng" algn="ctr">
+                      <a:solidFill>
+                        <a:srgbClr val="909090"/>
+                      </a:solidFill>
+                      <a:prstDash val="solid"/>
+                      <a:round/>
+                      <a:headEnd type="none" w="med" len="med"/>
+                      <a:tailEnd type="none" w="med" len="med"/>
                     </a:lnL>
-                    <a:lnR w="0" cap="flat" cmpd="sng" algn="ctr">
-                      <a:noFill/>
+                    <a:lnR w="12700" cap="flat" cmpd="sng" algn="ctr">
+                      <a:solidFill>
+                        <a:srgbClr val="909090"/>
+                      </a:solidFill>
+                      <a:prstDash val="solid"/>
+                      <a:round/>
+                      <a:headEnd type="none" w="med" len="med"/>
+                      <a:tailEnd type="none" w="med" len="med"/>
                     </a:lnR>
                     <a:lnT w="12700" cap="flat" cmpd="sng" algn="ctr">
                       <a:solidFill>
@@ -1290,8 +1293,14 @@
                       <a:headEnd type="none" w="med" len="med"/>
                       <a:tailEnd type="none" w="med" len="med"/>
                     </a:lnT>
-                    <a:lnB w="0" cap="flat" cmpd="sng" algn="ctr">
-                      <a:noFill/>
+                    <a:lnB w="12700" cap="flat" cmpd="sng" algn="ctr">
+                      <a:solidFill>
+                        <a:srgbClr val="909090"/>
+                      </a:solidFill>
+                      <a:prstDash val="solid"/>
+                      <a:round/>
+                      <a:headEnd type="none" w="med" len="med"/>
+                      <a:tailEnd type="none" w="med" len="med"/>
                     </a:lnB>
                   </a:tcPr>
                 </a:tc>
@@ -1322,11 +1331,23 @@
                     </a:p>
                   </a:txBody>
                   <a:tcPr marL="0" marR="0" marT="0" marB="0" anchor="ctr">
-                    <a:lnL w="0" cap="flat" cmpd="sng" algn="ctr">
-                      <a:noFill/>
+                    <a:lnL w="12700" cap="flat" cmpd="sng" algn="ctr">
+                      <a:solidFill>
+                        <a:srgbClr val="909090"/>
+                      </a:solidFill>
+                      <a:prstDash val="solid"/>
+                      <a:round/>
+                      <a:headEnd type="none" w="med" len="med"/>
+                      <a:tailEnd type="none" w="med" len="med"/>
                     </a:lnL>
-                    <a:lnR w="0" cap="flat" cmpd="sng" algn="ctr">
-                      <a:noFill/>
+                    <a:lnR w="12700" cap="flat" cmpd="sng" algn="ctr">
+                      <a:solidFill>
+                        <a:srgbClr val="909090"/>
+                      </a:solidFill>
+                      <a:prstDash val="solid"/>
+                      <a:round/>
+                      <a:headEnd type="none" w="med" len="med"/>
+                      <a:tailEnd type="none" w="med" len="med"/>
                     </a:lnR>
                     <a:lnT w="12700" cap="flat" cmpd="sng" algn="ctr">
                       <a:solidFill>
@@ -1337,8 +1358,14 @@
                       <a:headEnd type="none" w="med" len="med"/>
                       <a:tailEnd type="none" w="med" len="med"/>
                     </a:lnT>
-                    <a:lnB w="0" cap="flat" cmpd="sng" algn="ctr">
-                      <a:noFill/>
+                    <a:lnB w="12700" cap="flat" cmpd="sng" algn="ctr">
+                      <a:solidFill>
+                        <a:srgbClr val="909090"/>
+                      </a:solidFill>
+                      <a:prstDash val="solid"/>
+                      <a:round/>
+                      <a:headEnd type="none" w="med" len="med"/>
+                      <a:tailEnd type="none" w="med" len="med"/>
                     </a:lnB>
                   </a:tcPr>
                 </a:tc>
@@ -1369,11 +1396,23 @@
                     </a:p>
                   </a:txBody>
                   <a:tcPr marL="0" marR="0" marT="0" marB="0" anchor="ctr">
-                    <a:lnL w="0" cap="flat" cmpd="sng" algn="ctr">
-                      <a:noFill/>
+                    <a:lnL w="12700" cap="flat" cmpd="sng" algn="ctr">
+                      <a:solidFill>
+                        <a:srgbClr val="909090"/>
+                      </a:solidFill>
+                      <a:prstDash val="solid"/>
+                      <a:round/>
+                      <a:headEnd type="none" w="med" len="med"/>
+                      <a:tailEnd type="none" w="med" len="med"/>
                     </a:lnL>
-                    <a:lnR w="0" cap="flat" cmpd="sng" algn="ctr">
-                      <a:noFill/>
+                    <a:lnR w="12700" cap="flat" cmpd="sng" algn="ctr">
+                      <a:solidFill>
+                        <a:srgbClr val="909090"/>
+                      </a:solidFill>
+                      <a:prstDash val="solid"/>
+                      <a:round/>
+                      <a:headEnd type="none" w="med" len="med"/>
+                      <a:tailEnd type="none" w="med" len="med"/>
                     </a:lnR>
                     <a:lnT w="12700" cap="flat" cmpd="sng" algn="ctr">
                       <a:solidFill>
@@ -1384,8 +1423,14 @@
                       <a:headEnd type="none" w="med" len="med"/>
                       <a:tailEnd type="none" w="med" len="med"/>
                     </a:lnT>
-                    <a:lnB w="0" cap="flat" cmpd="sng" algn="ctr">
-                      <a:noFill/>
+                    <a:lnB w="12700" cap="flat" cmpd="sng" algn="ctr">
+                      <a:solidFill>
+                        <a:srgbClr val="909090"/>
+                      </a:solidFill>
+                      <a:prstDash val="solid"/>
+                      <a:round/>
+                      <a:headEnd type="none" w="med" len="med"/>
+                      <a:tailEnd type="none" w="med" len="med"/>
                     </a:lnB>
                   </a:tcPr>
                 </a:tc>
@@ -1418,11 +1463,23 @@
                     </a:p>
                   </a:txBody>
                   <a:tcPr marL="0" marR="0" marT="0" marB="0" anchor="ctr">
-                    <a:lnL w="0" cap="flat" cmpd="sng" algn="ctr">
-                      <a:noFill/>
+                    <a:lnL w="12700" cap="flat" cmpd="sng" algn="ctr">
+                      <a:solidFill>
+                        <a:srgbClr val="909090"/>
+                      </a:solidFill>
+                      <a:prstDash val="solid"/>
+                      <a:round/>
+                      <a:headEnd type="none" w="med" len="med"/>
+                      <a:tailEnd type="none" w="med" len="med"/>
                     </a:lnL>
-                    <a:lnR w="0" cap="flat" cmpd="sng" algn="ctr">
-                      <a:noFill/>
+                    <a:lnR w="12700" cap="flat" cmpd="sng" algn="ctr">
+                      <a:solidFill>
+                        <a:srgbClr val="909090"/>
+                      </a:solidFill>
+                      <a:prstDash val="solid"/>
+                      <a:round/>
+                      <a:headEnd type="none" w="med" len="med"/>
+                      <a:tailEnd type="none" w="med" len="med"/>
                     </a:lnR>
                     <a:lnT w="12700" cap="flat" cmpd="sng" algn="ctr">
                       <a:solidFill>
@@ -1433,8 +1490,14 @@
                       <a:headEnd type="none" w="med" len="med"/>
                       <a:tailEnd type="none" w="med" len="med"/>
                     </a:lnT>
-                    <a:lnB w="0" cap="flat" cmpd="sng" algn="ctr">
-                      <a:noFill/>
+                    <a:lnB w="12700" cap="flat" cmpd="sng" algn="ctr">
+                      <a:solidFill>
+                        <a:srgbClr val="909090"/>
+                      </a:solidFill>
+                      <a:prstDash val="solid"/>
+                      <a:round/>
+                      <a:headEnd type="none" w="med" len="med"/>
+                      <a:tailEnd type="none" w="med" len="med"/>
                     </a:lnB>
                   </a:tcPr>
                 </a:tc>
@@ -1465,11 +1528,23 @@
                     </a:p>
                   </a:txBody>
                   <a:tcPr marL="0" marR="0" marT="0" marB="0" anchor="ctr">
-                    <a:lnL w="0" cap="flat" cmpd="sng" algn="ctr">
-                      <a:noFill/>
+                    <a:lnL w="12700" cap="flat" cmpd="sng" algn="ctr">
+                      <a:solidFill>
+                        <a:srgbClr val="909090"/>
+                      </a:solidFill>
+                      <a:prstDash val="solid"/>
+                      <a:round/>
+                      <a:headEnd type="none" w="med" len="med"/>
+                      <a:tailEnd type="none" w="med" len="med"/>
                     </a:lnL>
-                    <a:lnR w="0" cap="flat" cmpd="sng" algn="ctr">
-                      <a:noFill/>
+                    <a:lnR w="12700" cap="flat" cmpd="sng" algn="ctr">
+                      <a:solidFill>
+                        <a:srgbClr val="909090"/>
+                      </a:solidFill>
+                      <a:prstDash val="solid"/>
+                      <a:round/>
+                      <a:headEnd type="none" w="med" len="med"/>
+                      <a:tailEnd type="none" w="med" len="med"/>
                     </a:lnR>
                     <a:lnT w="12700" cap="flat" cmpd="sng" algn="ctr">
                       <a:solidFill>
@@ -1480,8 +1555,14 @@
                       <a:headEnd type="none" w="med" len="med"/>
                       <a:tailEnd type="none" w="med" len="med"/>
                     </a:lnT>
-                    <a:lnB w="0" cap="flat" cmpd="sng" algn="ctr">
-                      <a:noFill/>
+                    <a:lnB w="12700" cap="flat" cmpd="sng" algn="ctr">
+                      <a:solidFill>
+                        <a:srgbClr val="909090"/>
+                      </a:solidFill>
+                      <a:prstDash val="solid"/>
+                      <a:round/>
+                      <a:headEnd type="none" w="med" len="med"/>
+                      <a:tailEnd type="none" w="med" len="med"/>
                     </a:lnB>
                   </a:tcPr>
                 </a:tc>
@@ -1512,11 +1593,23 @@
                     </a:p>
                   </a:txBody>
                   <a:tcPr marL="0" marR="0" marT="0" marB="0" anchor="ctr">
-                    <a:lnL w="0" cap="flat" cmpd="sng" algn="ctr">
-                      <a:noFill/>
+                    <a:lnL w="12700" cap="flat" cmpd="sng" algn="ctr">
+                      <a:solidFill>
+                        <a:srgbClr val="909090"/>
+                      </a:solidFill>
+                      <a:prstDash val="solid"/>
+                      <a:round/>
+                      <a:headEnd type="none" w="med" len="med"/>
+                      <a:tailEnd type="none" w="med" len="med"/>
                     </a:lnL>
-                    <a:lnR w="0" cap="flat" cmpd="sng" algn="ctr">
-                      <a:noFill/>
+                    <a:lnR w="12700" cap="flat" cmpd="sng" algn="ctr">
+                      <a:solidFill>
+                        <a:srgbClr val="909090"/>
+                      </a:solidFill>
+                      <a:prstDash val="solid"/>
+                      <a:round/>
+                      <a:headEnd type="none" w="med" len="med"/>
+                      <a:tailEnd type="none" w="med" len="med"/>
                     </a:lnR>
                     <a:lnT w="12700" cap="flat" cmpd="sng" algn="ctr">
                       <a:solidFill>
@@ -1527,8 +1620,14 @@
                       <a:headEnd type="none" w="med" len="med"/>
                       <a:tailEnd type="none" w="med" len="med"/>
                     </a:lnT>
-                    <a:lnB w="0" cap="flat" cmpd="sng" algn="ctr">
-                      <a:noFill/>
+                    <a:lnB w="12700" cap="flat" cmpd="sng" algn="ctr">
+                      <a:solidFill>
+                        <a:srgbClr val="909090"/>
+                      </a:solidFill>
+                      <a:prstDash val="solid"/>
+                      <a:round/>
+                      <a:headEnd type="none" w="med" len="med"/>
+                      <a:tailEnd type="none" w="med" len="med"/>
                     </a:lnB>
                   </a:tcPr>
                 </a:tc>
@@ -1561,11 +1660,23 @@
                     </a:p>
                   </a:txBody>
                   <a:tcPr marL="0" marR="0" marT="0" marB="0" anchor="ctr">
-                    <a:lnL w="0" cap="flat" cmpd="sng" algn="ctr">
-                      <a:noFill/>
+                    <a:lnL w="12700" cap="flat" cmpd="sng" algn="ctr">
+                      <a:solidFill>
+                        <a:srgbClr val="909090"/>
+                      </a:solidFill>
+                      <a:prstDash val="solid"/>
+                      <a:round/>
+                      <a:headEnd type="none" w="med" len="med"/>
+                      <a:tailEnd type="none" w="med" len="med"/>
                     </a:lnL>
-                    <a:lnR w="0" cap="flat" cmpd="sng" algn="ctr">
-                      <a:noFill/>
+                    <a:lnR w="12700" cap="flat" cmpd="sng" algn="ctr">
+                      <a:solidFill>
+                        <a:srgbClr val="909090"/>
+                      </a:solidFill>
+                      <a:prstDash val="solid"/>
+                      <a:round/>
+                      <a:headEnd type="none" w="med" len="med"/>
+                      <a:tailEnd type="none" w="med" len="med"/>
                     </a:lnR>
                     <a:lnT w="12700" cap="flat" cmpd="sng" algn="ctr">
                       <a:solidFill>
@@ -1576,8 +1687,14 @@
                       <a:headEnd type="none" w="med" len="med"/>
                       <a:tailEnd type="none" w="med" len="med"/>
                     </a:lnT>
-                    <a:lnB w="0" cap="flat" cmpd="sng" algn="ctr">
-                      <a:noFill/>
+                    <a:lnB w="12700" cap="flat" cmpd="sng" algn="ctr">
+                      <a:solidFill>
+                        <a:srgbClr val="909090"/>
+                      </a:solidFill>
+                      <a:prstDash val="solid"/>
+                      <a:round/>
+                      <a:headEnd type="none" w="med" len="med"/>
+                      <a:tailEnd type="none" w="med" len="med"/>
                     </a:lnB>
                   </a:tcPr>
                 </a:tc>
@@ -1608,11 +1725,23 @@
                     </a:p>
                   </a:txBody>
                   <a:tcPr marL="0" marR="0" marT="0" marB="0" anchor="ctr">
-                    <a:lnL w="0" cap="flat" cmpd="sng" algn="ctr">
-                      <a:noFill/>
+                    <a:lnL w="12700" cap="flat" cmpd="sng" algn="ctr">
+                      <a:solidFill>
+                        <a:srgbClr val="909090"/>
+                      </a:solidFill>
+                      <a:prstDash val="solid"/>
+                      <a:round/>
+                      <a:headEnd type="none" w="med" len="med"/>
+                      <a:tailEnd type="none" w="med" len="med"/>
                     </a:lnL>
-                    <a:lnR w="0" cap="flat" cmpd="sng" algn="ctr">
-                      <a:noFill/>
+                    <a:lnR w="12700" cap="flat" cmpd="sng" algn="ctr">
+                      <a:solidFill>
+                        <a:srgbClr val="909090"/>
+                      </a:solidFill>
+                      <a:prstDash val="solid"/>
+                      <a:round/>
+                      <a:headEnd type="none" w="med" len="med"/>
+                      <a:tailEnd type="none" w="med" len="med"/>
                     </a:lnR>
                     <a:lnT w="12700" cap="flat" cmpd="sng" algn="ctr">
                       <a:solidFill>
@@ -1623,8 +1752,14 @@
                       <a:headEnd type="none" w="med" len="med"/>
                       <a:tailEnd type="none" w="med" len="med"/>
                     </a:lnT>
-                    <a:lnB w="0" cap="flat" cmpd="sng" algn="ctr">
-                      <a:noFill/>
+                    <a:lnB w="12700" cap="flat" cmpd="sng" algn="ctr">
+                      <a:solidFill>
+                        <a:srgbClr val="909090"/>
+                      </a:solidFill>
+                      <a:prstDash val="solid"/>
+                      <a:round/>
+                      <a:headEnd type="none" w="med" len="med"/>
+                      <a:tailEnd type="none" w="med" len="med"/>
                     </a:lnB>
                   </a:tcPr>
                 </a:tc>
@@ -1655,11 +1790,23 @@
                     </a:p>
                   </a:txBody>
                   <a:tcPr marL="0" marR="0" marT="0" marB="0" anchor="ctr">
-                    <a:lnL w="0" cap="flat" cmpd="sng" algn="ctr">
-                      <a:noFill/>
+                    <a:lnL w="12700" cap="flat" cmpd="sng" algn="ctr">
+                      <a:solidFill>
+                        <a:srgbClr val="909090"/>
+                      </a:solidFill>
+                      <a:prstDash val="solid"/>
+                      <a:round/>
+                      <a:headEnd type="none" w="med" len="med"/>
+                      <a:tailEnd type="none" w="med" len="med"/>
                     </a:lnL>
-                    <a:lnR w="0" cap="flat" cmpd="sng" algn="ctr">
-                      <a:noFill/>
+                    <a:lnR w="12700" cap="flat" cmpd="sng" algn="ctr">
+                      <a:solidFill>
+                        <a:srgbClr val="909090"/>
+                      </a:solidFill>
+                      <a:prstDash val="solid"/>
+                      <a:round/>
+                      <a:headEnd type="none" w="med" len="med"/>
+                      <a:tailEnd type="none" w="med" len="med"/>
                     </a:lnR>
                     <a:lnT w="12700" cap="flat" cmpd="sng" algn="ctr">
                       <a:solidFill>
@@ -1670,8 +1817,14 @@
                       <a:headEnd type="none" w="med" len="med"/>
                       <a:tailEnd type="none" w="med" len="med"/>
                     </a:lnT>
-                    <a:lnB w="0" cap="flat" cmpd="sng" algn="ctr">
-                      <a:noFill/>
+                    <a:lnB w="12700" cap="flat" cmpd="sng" algn="ctr">
+                      <a:solidFill>
+                        <a:srgbClr val="909090"/>
+                      </a:solidFill>
+                      <a:prstDash val="solid"/>
+                      <a:round/>
+                      <a:headEnd type="none" w="med" len="med"/>
+                      <a:tailEnd type="none" w="med" len="med"/>
                     </a:lnB>
                   </a:tcPr>
                 </a:tc>
@@ -1682,7 +1835,7 @@
       </p:graphicFrame>
       <p:pic>
         <p:nvPicPr>
-          <p:cNvPr id="17" name="Image 1" descr="/workspaces/codespaces-blank/ai_llm_slides/videos/machine-learning/03_ridger_regression_gradient_descent/recreated_pptx/build/assets/eq_021_det0.png">    </p:cNvPr>
+          <p:cNvPr id="17" name="Image 1" descr="/home/ahmed/Projects/ai_llm_slides/videos/machine-learning/03_ridger_regression_gradient_descent/recreated_pptx/build/assets/eq_021_det0.png">    </p:cNvPr>
           <p:cNvPicPr>
             <a:picLocks noChangeAspect="1"/>
           </p:cNvPicPr>
@@ -1706,27 +1859,42 @@
       </p:pic>
       <p:sp>
         <p:nvSpPr>
-          <p:cNvPr id="18" name="Shape 13"/>
+          <p:cNvPr id="18" name="Text 13"/>
           <p:cNvSpPr/>
           <p:nvPr/>
         </p:nvSpPr>
         <p:spPr>
           <a:xfrm>
-            <a:off x="5842000" y="2552700"/>
-            <a:ext cx="203200" cy="0"/>
+            <a:off x="5803900" y="2438400"/>
+            <a:ext cx="457200" cy="228600"/>
           </a:xfrm>
-          <a:prstGeom prst="line">
+          <a:prstGeom prst="rect">
             <a:avLst/>
           </a:prstGeom>
           <a:noFill/>
-          <a:ln w="25400">
-            <a:solidFill>
-              <a:srgbClr val="0000FF"/>
-            </a:solidFill>
-            <a:prstDash val="solid"/>
-            <a:tailEnd type="triangle"/>
-          </a:ln>
+          <a:ln/>
         </p:spPr>
+        <p:txBody>
+          <a:bodyPr wrap="square" lIns="0" tIns="0" rIns="0" bIns="0" rtlCol="0" anchor="ctr"/>
+          <a:lstStyle/>
+          <a:p>
+            <a:pPr algn="ctr" indent="0" marL="0">
+              <a:buNone/>
+            </a:pPr>
+            <a:r>
+              <a:rPr lang="en-US" sz="2300" dirty="0">
+                <a:solidFill>
+                  <a:srgbClr val="0000FF"/>
+                </a:solidFill>
+                <a:latin typeface="Liberation Serif" pitchFamily="34" charset="0"/>
+                <a:ea typeface="Liberation Serif" pitchFamily="34" charset="-122"/>
+                <a:cs typeface="Liberation Serif" pitchFamily="34" charset="-120"/>
+              </a:rPr>
+              <a:t>⇒</a:t>
+            </a:r>
+            <a:endParaRPr lang="en-US" sz="2300" dirty="0"/>
+          </a:p>
+        </p:txBody>
       </p:sp>
       <p:sp>
         <p:nvSpPr>
@@ -1769,27 +1937,42 @@
       </p:sp>
       <p:sp>
         <p:nvSpPr>
-          <p:cNvPr id="20" name="Shape 15"/>
+          <p:cNvPr id="20" name="Text 15"/>
           <p:cNvSpPr/>
           <p:nvPr/>
         </p:nvSpPr>
         <p:spPr>
           <a:xfrm>
-            <a:off x="8382000" y="2552700"/>
-            <a:ext cx="215900" cy="0"/>
+            <a:off x="8343900" y="2438400"/>
+            <a:ext cx="469900" cy="228600"/>
           </a:xfrm>
-          <a:prstGeom prst="line">
+          <a:prstGeom prst="rect">
             <a:avLst/>
           </a:prstGeom>
           <a:noFill/>
-          <a:ln w="25400">
-            <a:solidFill>
-              <a:srgbClr val="0000FF"/>
-            </a:solidFill>
-            <a:prstDash val="solid"/>
-            <a:tailEnd type="triangle"/>
-          </a:ln>
+          <a:ln/>
         </p:spPr>
+        <p:txBody>
+          <a:bodyPr wrap="square" lIns="0" tIns="0" rIns="0" bIns="0" rtlCol="0" anchor="ctr"/>
+          <a:lstStyle/>
+          <a:p>
+            <a:pPr algn="ctr" indent="0" marL="0">
+              <a:buNone/>
+            </a:pPr>
+            <a:r>
+              <a:rPr lang="en-US" sz="2300" dirty="0">
+                <a:solidFill>
+                  <a:srgbClr val="0000FF"/>
+                </a:solidFill>
+                <a:latin typeface="Liberation Serif" pitchFamily="34" charset="0"/>
+                <a:ea typeface="Liberation Serif" pitchFamily="34" charset="-122"/>
+                <a:cs typeface="Liberation Serif" pitchFamily="34" charset="-120"/>
+              </a:rPr>
+              <a:t>⇒</a:t>
+            </a:r>
+            <a:endParaRPr lang="en-US" sz="2300" dirty="0"/>
+          </a:p>
+        </p:txBody>
       </p:sp>
       <p:sp>
         <p:nvSpPr>
@@ -1832,7 +2015,7 @@
       </p:sp>
       <p:pic>
         <p:nvPicPr>
-          <p:cNvPr id="22" name="Image 2" descr="/workspaces/codespaces-blank/ai_llm_slides/videos/machine-learning/03_ridger_regression_gradient_descent/recreated_pptx/build/assets/eq_021_regmat.png">    </p:cNvPr>
+          <p:cNvPr id="22" name="Image 2" descr="/home/ahmed/Projects/ai_llm_slides/videos/machine-learning/03_ridger_regression_gradient_descent/recreated_pptx/build/assets/eq_021_regmat.png">    </p:cNvPr>
           <p:cNvPicPr>
             <a:picLocks noChangeAspect="1"/>
           </p:cNvPicPr>
@@ -1856,7 +2039,7 @@
       </p:pic>
       <p:pic>
         <p:nvPicPr>
-          <p:cNvPr id="23" name="Image 3" descr="/workspaces/codespaces-blank/ai_llm_slides/videos/machine-learning/03_ridger_regression_gradient_descent/recreated_pptx/build/assets/eq_021_lambda3.png">    </p:cNvPr>
+          <p:cNvPr id="23" name="Image 3" descr="/home/ahmed/Projects/ai_llm_slides/videos/machine-learning/03_ridger_regression_gradient_descent/recreated_pptx/build/assets/eq_021_lambda3.png">    </p:cNvPr>
           <p:cNvPicPr>
             <a:picLocks noChangeAspect="1"/>
           </p:cNvPicPr>
@@ -1886,10 +2069,10 @@
         </p:nvSpPr>
         <p:spPr>
           <a:xfrm>
-            <a:off x="1358900" y="4381500"/>
-            <a:ext cx="469900" cy="165100"/>
+            <a:off x="1358900" y="4318000"/>
+            <a:ext cx="469900" cy="304800"/>
           </a:xfrm>
-          <a:prstGeom prst="rect">
+          <a:prstGeom prst="ellipse">
             <a:avLst/>
           </a:prstGeom>
           <a:solidFill>
@@ -1906,10 +2089,10 @@
         </p:nvSpPr>
         <p:spPr>
           <a:xfrm>
-            <a:off x="2197100" y="4610100"/>
-            <a:ext cx="482600" cy="152400"/>
+            <a:off x="2197100" y="4521200"/>
+            <a:ext cx="482600" cy="292100"/>
           </a:xfrm>
-          <a:prstGeom prst="rect">
+          <a:prstGeom prst="ellipse">
             <a:avLst/>
           </a:prstGeom>
           <a:solidFill>
@@ -1926,10 +2109,10 @@
         </p:nvSpPr>
         <p:spPr>
           <a:xfrm>
-            <a:off x="3086100" y="4826000"/>
-            <a:ext cx="469900" cy="165100"/>
+            <a:off x="3086100" y="4711700"/>
+            <a:ext cx="469900" cy="292100"/>
           </a:xfrm>
-          <a:prstGeom prst="rect">
+          <a:prstGeom prst="ellipse">
             <a:avLst/>
           </a:prstGeom>
           <a:solidFill>
@@ -1954,16 +2137,16 @@
         </p:nvGraphicFramePr>
         <p:xfrm>
           <a:off x="1130300" y="4330700"/>
-          <a:ext cx="2616200" cy="685800"/>
+          <a:ext cx="2413000" cy="685800"/>
         </p:xfrm>
         <a:graphic>
           <a:graphicData uri="http://schemas.openxmlformats.org/drawingml/2006/table">
             <a:tbl>
               <a:tblPr/>
               <a:tblGrid>
-                <a:gridCol w="872067"/>
-                <a:gridCol w="872067"/>
-                <a:gridCol w="872067"/>
+                <a:gridCol w="804333"/>
+                <a:gridCol w="804333"/>
+                <a:gridCol w="804333"/>
               </a:tblGrid>
               <a:tr h="228600">
                 <a:tc>
@@ -1993,11 +2176,23 @@
                     </a:p>
                   </a:txBody>
                   <a:tcPr marL="0" marR="0" marT="0" marB="0" anchor="ctr">
-                    <a:lnL w="0" cap="flat" cmpd="sng" algn="ctr">
-                      <a:noFill/>
+                    <a:lnL w="12700" cap="flat" cmpd="sng" algn="ctr">
+                      <a:solidFill>
+                        <a:srgbClr val="909090"/>
+                      </a:solidFill>
+                      <a:prstDash val="solid"/>
+                      <a:round/>
+                      <a:headEnd type="none" w="med" len="med"/>
+                      <a:tailEnd type="none" w="med" len="med"/>
                     </a:lnL>
-                    <a:lnR w="0" cap="flat" cmpd="sng" algn="ctr">
-                      <a:noFill/>
+                    <a:lnR w="12700" cap="flat" cmpd="sng" algn="ctr">
+                      <a:solidFill>
+                        <a:srgbClr val="909090"/>
+                      </a:solidFill>
+                      <a:prstDash val="solid"/>
+                      <a:round/>
+                      <a:headEnd type="none" w="med" len="med"/>
+                      <a:tailEnd type="none" w="med" len="med"/>
                     </a:lnR>
                     <a:lnT w="12700" cap="flat" cmpd="sng" algn="ctr">
                       <a:solidFill>
@@ -2008,8 +2203,14 @@
                       <a:headEnd type="none" w="med" len="med"/>
                       <a:tailEnd type="none" w="med" len="med"/>
                     </a:lnT>
-                    <a:lnB w="0" cap="flat" cmpd="sng" algn="ctr">
-                      <a:noFill/>
+                    <a:lnB w="12700" cap="flat" cmpd="sng" algn="ctr">
+                      <a:solidFill>
+                        <a:srgbClr val="909090"/>
+                      </a:solidFill>
+                      <a:prstDash val="solid"/>
+                      <a:round/>
+                      <a:headEnd type="none" w="med" len="med"/>
+                      <a:tailEnd type="none" w="med" len="med"/>
                     </a:lnB>
                   </a:tcPr>
                 </a:tc>
@@ -2040,11 +2241,23 @@
                     </a:p>
                   </a:txBody>
                   <a:tcPr marL="0" marR="0" marT="0" marB="0" anchor="ctr">
-                    <a:lnL w="0" cap="flat" cmpd="sng" algn="ctr">
-                      <a:noFill/>
+                    <a:lnL w="12700" cap="flat" cmpd="sng" algn="ctr">
+                      <a:solidFill>
+                        <a:srgbClr val="909090"/>
+                      </a:solidFill>
+                      <a:prstDash val="solid"/>
+                      <a:round/>
+                      <a:headEnd type="none" w="med" len="med"/>
+                      <a:tailEnd type="none" w="med" len="med"/>
                     </a:lnL>
-                    <a:lnR w="0" cap="flat" cmpd="sng" algn="ctr">
-                      <a:noFill/>
+                    <a:lnR w="12700" cap="flat" cmpd="sng" algn="ctr">
+                      <a:solidFill>
+                        <a:srgbClr val="909090"/>
+                      </a:solidFill>
+                      <a:prstDash val="solid"/>
+                      <a:round/>
+                      <a:headEnd type="none" w="med" len="med"/>
+                      <a:tailEnd type="none" w="med" len="med"/>
                     </a:lnR>
                     <a:lnT w="12700" cap="flat" cmpd="sng" algn="ctr">
                       <a:solidFill>
@@ -2055,8 +2268,14 @@
                       <a:headEnd type="none" w="med" len="med"/>
                       <a:tailEnd type="none" w="med" len="med"/>
                     </a:lnT>
-                    <a:lnB w="0" cap="flat" cmpd="sng" algn="ctr">
-                      <a:noFill/>
+                    <a:lnB w="12700" cap="flat" cmpd="sng" algn="ctr">
+                      <a:solidFill>
+                        <a:srgbClr val="909090"/>
+                      </a:solidFill>
+                      <a:prstDash val="solid"/>
+                      <a:round/>
+                      <a:headEnd type="none" w="med" len="med"/>
+                      <a:tailEnd type="none" w="med" len="med"/>
                     </a:lnB>
                   </a:tcPr>
                 </a:tc>
@@ -2087,11 +2306,23 @@
                     </a:p>
                   </a:txBody>
                   <a:tcPr marL="0" marR="0" marT="0" marB="0" anchor="ctr">
-                    <a:lnL w="0" cap="flat" cmpd="sng" algn="ctr">
-                      <a:noFill/>
+                    <a:lnL w="12700" cap="flat" cmpd="sng" algn="ctr">
+                      <a:solidFill>
+                        <a:srgbClr val="909090"/>
+                      </a:solidFill>
+                      <a:prstDash val="solid"/>
+                      <a:round/>
+                      <a:headEnd type="none" w="med" len="med"/>
+                      <a:tailEnd type="none" w="med" len="med"/>
                     </a:lnL>
-                    <a:lnR w="0" cap="flat" cmpd="sng" algn="ctr">
-                      <a:noFill/>
+                    <a:lnR w="12700" cap="flat" cmpd="sng" algn="ctr">
+                      <a:solidFill>
+                        <a:srgbClr val="909090"/>
+                      </a:solidFill>
+                      <a:prstDash val="solid"/>
+                      <a:round/>
+                      <a:headEnd type="none" w="med" len="med"/>
+                      <a:tailEnd type="none" w="med" len="med"/>
                     </a:lnR>
                     <a:lnT w="12700" cap="flat" cmpd="sng" algn="ctr">
                       <a:solidFill>
@@ -2102,8 +2333,14 @@
                       <a:headEnd type="none" w="med" len="med"/>
                       <a:tailEnd type="none" w="med" len="med"/>
                     </a:lnT>
-                    <a:lnB w="0" cap="flat" cmpd="sng" algn="ctr">
-                      <a:noFill/>
+                    <a:lnB w="12700" cap="flat" cmpd="sng" algn="ctr">
+                      <a:solidFill>
+                        <a:srgbClr val="909090"/>
+                      </a:solidFill>
+                      <a:prstDash val="solid"/>
+                      <a:round/>
+                      <a:headEnd type="none" w="med" len="med"/>
+                      <a:tailEnd type="none" w="med" len="med"/>
                     </a:lnB>
                   </a:tcPr>
                 </a:tc>
@@ -2136,11 +2373,23 @@
                     </a:p>
                   </a:txBody>
                   <a:tcPr marL="0" marR="0" marT="0" marB="0" anchor="ctr">
-                    <a:lnL w="0" cap="flat" cmpd="sng" algn="ctr">
-                      <a:noFill/>
+                    <a:lnL w="12700" cap="flat" cmpd="sng" algn="ctr">
+                      <a:solidFill>
+                        <a:srgbClr val="909090"/>
+                      </a:solidFill>
+                      <a:prstDash val="solid"/>
+                      <a:round/>
+                      <a:headEnd type="none" w="med" len="med"/>
+                      <a:tailEnd type="none" w="med" len="med"/>
                     </a:lnL>
-                    <a:lnR w="0" cap="flat" cmpd="sng" algn="ctr">
-                      <a:noFill/>
+                    <a:lnR w="12700" cap="flat" cmpd="sng" algn="ctr">
+                      <a:solidFill>
+                        <a:srgbClr val="909090"/>
+                      </a:solidFill>
+                      <a:prstDash val="solid"/>
+                      <a:round/>
+                      <a:headEnd type="none" w="med" len="med"/>
+                      <a:tailEnd type="none" w="med" len="med"/>
                     </a:lnR>
                     <a:lnT w="12700" cap="flat" cmpd="sng" algn="ctr">
                       <a:solidFill>
@@ -2151,8 +2400,14 @@
                       <a:headEnd type="none" w="med" len="med"/>
                       <a:tailEnd type="none" w="med" len="med"/>
                     </a:lnT>
-                    <a:lnB w="0" cap="flat" cmpd="sng" algn="ctr">
-                      <a:noFill/>
+                    <a:lnB w="12700" cap="flat" cmpd="sng" algn="ctr">
+                      <a:solidFill>
+                        <a:srgbClr val="909090"/>
+                      </a:solidFill>
+                      <a:prstDash val="solid"/>
+                      <a:round/>
+                      <a:headEnd type="none" w="med" len="med"/>
+                      <a:tailEnd type="none" w="med" len="med"/>
                     </a:lnB>
                   </a:tcPr>
                 </a:tc>
@@ -2183,11 +2438,23 @@
                     </a:p>
                   </a:txBody>
                   <a:tcPr marL="0" marR="0" marT="0" marB="0" anchor="ctr">
-                    <a:lnL w="0" cap="flat" cmpd="sng" algn="ctr">
-                      <a:noFill/>
+                    <a:lnL w="12700" cap="flat" cmpd="sng" algn="ctr">
+                      <a:solidFill>
+                        <a:srgbClr val="909090"/>
+                      </a:solidFill>
+                      <a:prstDash val="solid"/>
+                      <a:round/>
+                      <a:headEnd type="none" w="med" len="med"/>
+                      <a:tailEnd type="none" w="med" len="med"/>
                     </a:lnL>
-                    <a:lnR w="0" cap="flat" cmpd="sng" algn="ctr">
-                      <a:noFill/>
+                    <a:lnR w="12700" cap="flat" cmpd="sng" algn="ctr">
+                      <a:solidFill>
+                        <a:srgbClr val="909090"/>
+                      </a:solidFill>
+                      <a:prstDash val="solid"/>
+                      <a:round/>
+                      <a:headEnd type="none" w="med" len="med"/>
+                      <a:tailEnd type="none" w="med" len="med"/>
                     </a:lnR>
                     <a:lnT w="12700" cap="flat" cmpd="sng" algn="ctr">
                       <a:solidFill>
@@ -2198,8 +2465,14 @@
                       <a:headEnd type="none" w="med" len="med"/>
                       <a:tailEnd type="none" w="med" len="med"/>
                     </a:lnT>
-                    <a:lnB w="0" cap="flat" cmpd="sng" algn="ctr">
-                      <a:noFill/>
+                    <a:lnB w="12700" cap="flat" cmpd="sng" algn="ctr">
+                      <a:solidFill>
+                        <a:srgbClr val="909090"/>
+                      </a:solidFill>
+                      <a:prstDash val="solid"/>
+                      <a:round/>
+                      <a:headEnd type="none" w="med" len="med"/>
+                      <a:tailEnd type="none" w="med" len="med"/>
                     </a:lnB>
                   </a:tcPr>
                 </a:tc>
@@ -2230,11 +2503,23 @@
                     </a:p>
                   </a:txBody>
                   <a:tcPr marL="0" marR="0" marT="0" marB="0" anchor="ctr">
-                    <a:lnL w="0" cap="flat" cmpd="sng" algn="ctr">
-                      <a:noFill/>
+                    <a:lnL w="12700" cap="flat" cmpd="sng" algn="ctr">
+                      <a:solidFill>
+                        <a:srgbClr val="909090"/>
+                      </a:solidFill>
+                      <a:prstDash val="solid"/>
+                      <a:round/>
+                      <a:headEnd type="none" w="med" len="med"/>
+                      <a:tailEnd type="none" w="med" len="med"/>
                     </a:lnL>
-                    <a:lnR w="0" cap="flat" cmpd="sng" algn="ctr">
-                      <a:noFill/>
+                    <a:lnR w="12700" cap="flat" cmpd="sng" algn="ctr">
+                      <a:solidFill>
+                        <a:srgbClr val="909090"/>
+                      </a:solidFill>
+                      <a:prstDash val="solid"/>
+                      <a:round/>
+                      <a:headEnd type="none" w="med" len="med"/>
+                      <a:tailEnd type="none" w="med" len="med"/>
                     </a:lnR>
                     <a:lnT w="12700" cap="flat" cmpd="sng" algn="ctr">
                       <a:solidFill>
@@ -2245,8 +2530,14 @@
                       <a:headEnd type="none" w="med" len="med"/>
                       <a:tailEnd type="none" w="med" len="med"/>
                     </a:lnT>
-                    <a:lnB w="0" cap="flat" cmpd="sng" algn="ctr">
-                      <a:noFill/>
+                    <a:lnB w="12700" cap="flat" cmpd="sng" algn="ctr">
+                      <a:solidFill>
+                        <a:srgbClr val="909090"/>
+                      </a:solidFill>
+                      <a:prstDash val="solid"/>
+                      <a:round/>
+                      <a:headEnd type="none" w="med" len="med"/>
+                      <a:tailEnd type="none" w="med" len="med"/>
                     </a:lnB>
                   </a:tcPr>
                 </a:tc>
@@ -2279,11 +2570,23 @@
                     </a:p>
                   </a:txBody>
                   <a:tcPr marL="0" marR="0" marT="0" marB="0" anchor="ctr">
-                    <a:lnL w="0" cap="flat" cmpd="sng" algn="ctr">
-                      <a:noFill/>
+                    <a:lnL w="12700" cap="flat" cmpd="sng" algn="ctr">
+                      <a:solidFill>
+                        <a:srgbClr val="909090"/>
+                      </a:solidFill>
+                      <a:prstDash val="solid"/>
+                      <a:round/>
+                      <a:headEnd type="none" w="med" len="med"/>
+                      <a:tailEnd type="none" w="med" len="med"/>
                     </a:lnL>
-                    <a:lnR w="0" cap="flat" cmpd="sng" algn="ctr">
-                      <a:noFill/>
+                    <a:lnR w="12700" cap="flat" cmpd="sng" algn="ctr">
+                      <a:solidFill>
+                        <a:srgbClr val="909090"/>
+                      </a:solidFill>
+                      <a:prstDash val="solid"/>
+                      <a:round/>
+                      <a:headEnd type="none" w="med" len="med"/>
+                      <a:tailEnd type="none" w="med" len="med"/>
                     </a:lnR>
                     <a:lnT w="12700" cap="flat" cmpd="sng" algn="ctr">
                       <a:solidFill>
@@ -2294,8 +2597,14 @@
                       <a:headEnd type="none" w="med" len="med"/>
                       <a:tailEnd type="none" w="med" len="med"/>
                     </a:lnT>
-                    <a:lnB w="0" cap="flat" cmpd="sng" algn="ctr">
-                      <a:noFill/>
+                    <a:lnB w="12700" cap="flat" cmpd="sng" algn="ctr">
+                      <a:solidFill>
+                        <a:srgbClr val="909090"/>
+                      </a:solidFill>
+                      <a:prstDash val="solid"/>
+                      <a:round/>
+                      <a:headEnd type="none" w="med" len="med"/>
+                      <a:tailEnd type="none" w="med" len="med"/>
                     </a:lnB>
                   </a:tcPr>
                 </a:tc>
@@ -2326,11 +2635,23 @@
                     </a:p>
                   </a:txBody>
                   <a:tcPr marL="0" marR="0" marT="0" marB="0" anchor="ctr">
-                    <a:lnL w="0" cap="flat" cmpd="sng" algn="ctr">
-                      <a:noFill/>
+                    <a:lnL w="12700" cap="flat" cmpd="sng" algn="ctr">
+                      <a:solidFill>
+                        <a:srgbClr val="909090"/>
+                      </a:solidFill>
+                      <a:prstDash val="solid"/>
+                      <a:round/>
+                      <a:headEnd type="none" w="med" len="med"/>
+                      <a:tailEnd type="none" w="med" len="med"/>
                     </a:lnL>
-                    <a:lnR w="0" cap="flat" cmpd="sng" algn="ctr">
-                      <a:noFill/>
+                    <a:lnR w="12700" cap="flat" cmpd="sng" algn="ctr">
+                      <a:solidFill>
+                        <a:srgbClr val="909090"/>
+                      </a:solidFill>
+                      <a:prstDash val="solid"/>
+                      <a:round/>
+                      <a:headEnd type="none" w="med" len="med"/>
+                      <a:tailEnd type="none" w="med" len="med"/>
                     </a:lnR>
                     <a:lnT w="12700" cap="flat" cmpd="sng" algn="ctr">
                       <a:solidFill>
@@ -2341,8 +2662,14 @@
                       <a:headEnd type="none" w="med" len="med"/>
                       <a:tailEnd type="none" w="med" len="med"/>
                     </a:lnT>
-                    <a:lnB w="0" cap="flat" cmpd="sng" algn="ctr">
-                      <a:noFill/>
+                    <a:lnB w="12700" cap="flat" cmpd="sng" algn="ctr">
+                      <a:solidFill>
+                        <a:srgbClr val="909090"/>
+                      </a:solidFill>
+                      <a:prstDash val="solid"/>
+                      <a:round/>
+                      <a:headEnd type="none" w="med" len="med"/>
+                      <a:tailEnd type="none" w="med" len="med"/>
                     </a:lnB>
                   </a:tcPr>
                 </a:tc>
@@ -2373,11 +2700,23 @@
                     </a:p>
                   </a:txBody>
                   <a:tcPr marL="0" marR="0" marT="0" marB="0" anchor="ctr">
-                    <a:lnL w="0" cap="flat" cmpd="sng" algn="ctr">
-                      <a:noFill/>
+                    <a:lnL w="12700" cap="flat" cmpd="sng" algn="ctr">
+                      <a:solidFill>
+                        <a:srgbClr val="909090"/>
+                      </a:solidFill>
+                      <a:prstDash val="solid"/>
+                      <a:round/>
+                      <a:headEnd type="none" w="med" len="med"/>
+                      <a:tailEnd type="none" w="med" len="med"/>
                     </a:lnL>
-                    <a:lnR w="0" cap="flat" cmpd="sng" algn="ctr">
-                      <a:noFill/>
+                    <a:lnR w="12700" cap="flat" cmpd="sng" algn="ctr">
+                      <a:solidFill>
+                        <a:srgbClr val="909090"/>
+                      </a:solidFill>
+                      <a:prstDash val="solid"/>
+                      <a:round/>
+                      <a:headEnd type="none" w="med" len="med"/>
+                      <a:tailEnd type="none" w="med" len="med"/>
                     </a:lnR>
                     <a:lnT w="12700" cap="flat" cmpd="sng" algn="ctr">
                       <a:solidFill>
@@ -2388,8 +2727,14 @@
                       <a:headEnd type="none" w="med" len="med"/>
                       <a:tailEnd type="none" w="med" len="med"/>
                     </a:lnT>
-                    <a:lnB w="0" cap="flat" cmpd="sng" algn="ctr">
-                      <a:noFill/>
+                    <a:lnB w="12700" cap="flat" cmpd="sng" algn="ctr">
+                      <a:solidFill>
+                        <a:srgbClr val="909090"/>
+                      </a:solidFill>
+                      <a:prstDash val="solid"/>
+                      <a:round/>
+                      <a:headEnd type="none" w="med" len="med"/>
+                      <a:tailEnd type="none" w="med" len="med"/>
                     </a:lnB>
                   </a:tcPr>
                 </a:tc>
@@ -2400,7 +2745,7 @@
       </p:graphicFrame>
       <p:pic>
         <p:nvPicPr>
-          <p:cNvPr id="28" name="Image 4" descr="/workspaces/codespaces-blank/ai_llm_slides/videos/machine-learning/03_ridger_regression_gradient_descent/recreated_pptx/build/assets/eq_021_d5685.png">    </p:cNvPr>
+          <p:cNvPr id="28" name="Image 4" descr="/home/ahmed/Projects/ai_llm_slides/videos/machine-learning/03_ridger_regression_gradient_descent/recreated_pptx/build/assets/eq_021_d5685.png">    </p:cNvPr>
           <p:cNvPicPr>
             <a:picLocks noChangeAspect="1"/>
           </p:cNvPicPr>
@@ -2424,27 +2769,42 @@
       </p:pic>
       <p:sp>
         <p:nvSpPr>
-          <p:cNvPr id="29" name="Shape 20"/>
+          <p:cNvPr id="29" name="Text 20"/>
           <p:cNvSpPr/>
           <p:nvPr/>
         </p:nvSpPr>
         <p:spPr>
           <a:xfrm>
-            <a:off x="6210300" y="4673600"/>
-            <a:ext cx="203200" cy="0"/>
+            <a:off x="6134100" y="4559300"/>
+            <a:ext cx="368300" cy="228600"/>
           </a:xfrm>
-          <a:prstGeom prst="line">
+          <a:prstGeom prst="rect">
             <a:avLst/>
           </a:prstGeom>
           <a:noFill/>
-          <a:ln w="25400">
-            <a:solidFill>
-              <a:srgbClr val="0000FF"/>
-            </a:solidFill>
-            <a:prstDash val="solid"/>
-            <a:tailEnd type="triangle"/>
-          </a:ln>
+          <a:ln/>
         </p:spPr>
+        <p:txBody>
+          <a:bodyPr wrap="square" lIns="0" tIns="0" rIns="0" bIns="0" rtlCol="0" anchor="ctr"/>
+          <a:lstStyle/>
+          <a:p>
+            <a:pPr algn="ctr" indent="0" marL="0">
+              <a:buNone/>
+            </a:pPr>
+            <a:r>
+              <a:rPr lang="en-US" sz="1300" dirty="0">
+                <a:solidFill>
+                  <a:srgbClr val="0000FF"/>
+                </a:solidFill>
+                <a:latin typeface="Liberation Serif" pitchFamily="34" charset="0"/>
+                <a:ea typeface="Liberation Serif" pitchFamily="34" charset="-122"/>
+                <a:cs typeface="Liberation Serif" pitchFamily="34" charset="-120"/>
+              </a:rPr>
+              <a:t>⇒</a:t>
+            </a:r>
+            <a:endParaRPr lang="en-US" sz="1300" dirty="0"/>
+          </a:p>
+        </p:txBody>
       </p:sp>
       <p:sp>
         <p:nvSpPr>
@@ -2454,7 +2814,7 @@
         </p:nvSpPr>
         <p:spPr>
           <a:xfrm>
-            <a:off x="6286500" y="4521200"/>
+            <a:off x="6540500" y="4521200"/>
             <a:ext cx="2667000" cy="304800"/>
           </a:xfrm>
           <a:prstGeom prst="rect">
@@ -2487,27 +2847,42 @@
       </p:sp>
       <p:sp>
         <p:nvSpPr>
-          <p:cNvPr id="31" name="Shape 22"/>
+          <p:cNvPr id="31" name="Text 22"/>
           <p:cNvSpPr/>
           <p:nvPr/>
         </p:nvSpPr>
         <p:spPr>
           <a:xfrm>
-            <a:off x="9245600" y="4673600"/>
-            <a:ext cx="203200" cy="0"/>
+            <a:off x="9169400" y="4559300"/>
+            <a:ext cx="368300" cy="228600"/>
           </a:xfrm>
-          <a:prstGeom prst="line">
+          <a:prstGeom prst="rect">
             <a:avLst/>
           </a:prstGeom>
           <a:noFill/>
-          <a:ln w="25400">
-            <a:solidFill>
-              <a:srgbClr val="0000FF"/>
-            </a:solidFill>
-            <a:prstDash val="solid"/>
-            <a:tailEnd type="triangle"/>
-          </a:ln>
+          <a:ln/>
         </p:spPr>
+        <p:txBody>
+          <a:bodyPr wrap="square" lIns="0" tIns="0" rIns="0" bIns="0" rtlCol="0" anchor="ctr"/>
+          <a:lstStyle/>
+          <a:p>
+            <a:pPr algn="ctr" indent="0" marL="0">
+              <a:buNone/>
+            </a:pPr>
+            <a:r>
+              <a:rPr lang="en-US" sz="1300" dirty="0">
+                <a:solidFill>
+                  <a:srgbClr val="0000FF"/>
+                </a:solidFill>
+                <a:latin typeface="Liberation Serif" pitchFamily="34" charset="0"/>
+                <a:ea typeface="Liberation Serif" pitchFamily="34" charset="-122"/>
+                <a:cs typeface="Liberation Serif" pitchFamily="34" charset="-120"/>
+              </a:rPr>
+              <a:t>⇒</a:t>
+            </a:r>
+            <a:endParaRPr lang="en-US" sz="1300" dirty="0"/>
+          </a:p>
+        </p:txBody>
       </p:sp>
       <p:sp>
         <p:nvSpPr>
@@ -2550,7 +2925,7 @@
       </p:sp>
       <p:pic>
         <p:nvPicPr>
-          <p:cNvPr id="33" name="Image 5" descr="/workspaces/codespaces-blank/ai_llm_slides/videos/machine-learning/03_ridger_regression_gradient_descent/recreated_pptx/build/assets/eq_021_invexpr.png">    </p:cNvPr>
+          <p:cNvPr id="33" name="Image 5" descr="/home/ahmed/Projects/ai_llm_slides/videos/machine-learning/03_ridger_regression_gradient_descent/recreated_pptx/build/assets/eq_021_invexpr.png">    </p:cNvPr>
           <p:cNvPicPr>
             <a:picLocks noChangeAspect="1"/>
           </p:cNvPicPr>
@@ -2574,27 +2949,42 @@
       </p:pic>
       <p:sp>
         <p:nvSpPr>
-          <p:cNvPr id="34" name="Shape 24"/>
+          <p:cNvPr id="34" name="Text 24"/>
           <p:cNvSpPr/>
           <p:nvPr/>
         </p:nvSpPr>
         <p:spPr>
           <a:xfrm>
-            <a:off x="4622800" y="6096000"/>
-            <a:ext cx="203200" cy="0"/>
+            <a:off x="4584700" y="5981700"/>
+            <a:ext cx="457200" cy="228600"/>
           </a:xfrm>
-          <a:prstGeom prst="line">
+          <a:prstGeom prst="rect">
             <a:avLst/>
           </a:prstGeom>
           <a:noFill/>
-          <a:ln w="25400">
-            <a:solidFill>
-              <a:srgbClr val="0000FF"/>
-            </a:solidFill>
-            <a:prstDash val="solid"/>
-            <a:tailEnd type="triangle"/>
-          </a:ln>
+          <a:ln/>
         </p:spPr>
+        <p:txBody>
+          <a:bodyPr wrap="square" lIns="0" tIns="0" rIns="0" bIns="0" rtlCol="0" anchor="ctr"/>
+          <a:lstStyle/>
+          <a:p>
+            <a:pPr algn="ctr" indent="0" marL="0">
+              <a:buNone/>
+            </a:pPr>
+            <a:r>
+              <a:rPr lang="en-US" sz="2300" dirty="0">
+                <a:solidFill>
+                  <a:srgbClr val="0000FF"/>
+                </a:solidFill>
+                <a:latin typeface="Liberation Serif" pitchFamily="34" charset="0"/>
+                <a:ea typeface="Liberation Serif" pitchFamily="34" charset="-122"/>
+                <a:cs typeface="Liberation Serif" pitchFamily="34" charset="-120"/>
+              </a:rPr>
+              <a:t>⇒</a:t>
+            </a:r>
+            <a:endParaRPr lang="en-US" sz="2300" dirty="0"/>
+          </a:p>
+        </p:txBody>
       </p:sp>
       <p:graphicFrame>
         <p:nvGraphicFramePr>
@@ -2651,11 +3041,23 @@
                     </a:p>
                   </a:txBody>
                   <a:tcPr marL="0" marR="0" marT="0" marB="0" anchor="ctr">
-                    <a:lnL w="0" cap="flat" cmpd="sng" algn="ctr">
-                      <a:noFill/>
+                    <a:lnL w="12700" cap="flat" cmpd="sng" algn="ctr">
+                      <a:solidFill>
+                        <a:srgbClr val="909090"/>
+                      </a:solidFill>
+                      <a:prstDash val="solid"/>
+                      <a:round/>
+                      <a:headEnd type="none" w="med" len="med"/>
+                      <a:tailEnd type="none" w="med" len="med"/>
                     </a:lnL>
-                    <a:lnR w="0" cap="flat" cmpd="sng" algn="ctr">
-                      <a:noFill/>
+                    <a:lnR w="12700" cap="flat" cmpd="sng" algn="ctr">
+                      <a:solidFill>
+                        <a:srgbClr val="909090"/>
+                      </a:solidFill>
+                      <a:prstDash val="solid"/>
+                      <a:round/>
+                      <a:headEnd type="none" w="med" len="med"/>
+                      <a:tailEnd type="none" w="med" len="med"/>
                     </a:lnR>
                     <a:lnT w="12700" cap="flat" cmpd="sng" algn="ctr">
                       <a:solidFill>
@@ -2666,8 +3068,14 @@
                       <a:headEnd type="none" w="med" len="med"/>
                       <a:tailEnd type="none" w="med" len="med"/>
                     </a:lnT>
-                    <a:lnB w="0" cap="flat" cmpd="sng" algn="ctr">
-                      <a:noFill/>
+                    <a:lnB w="12700" cap="flat" cmpd="sng" algn="ctr">
+                      <a:solidFill>
+                        <a:srgbClr val="909090"/>
+                      </a:solidFill>
+                      <a:prstDash val="solid"/>
+                      <a:round/>
+                      <a:headEnd type="none" w="med" len="med"/>
+                      <a:tailEnd type="none" w="med" len="med"/>
                     </a:lnB>
                   </a:tcPr>
                 </a:tc>
@@ -2698,11 +3106,23 @@
                     </a:p>
                   </a:txBody>
                   <a:tcPr marL="0" marR="0" marT="0" marB="0" anchor="ctr">
-                    <a:lnL w="0" cap="flat" cmpd="sng" algn="ctr">
-                      <a:noFill/>
+                    <a:lnL w="12700" cap="flat" cmpd="sng" algn="ctr">
+                      <a:solidFill>
+                        <a:srgbClr val="909090"/>
+                      </a:solidFill>
+                      <a:prstDash val="solid"/>
+                      <a:round/>
+                      <a:headEnd type="none" w="med" len="med"/>
+                      <a:tailEnd type="none" w="med" len="med"/>
                     </a:lnL>
-                    <a:lnR w="0" cap="flat" cmpd="sng" algn="ctr">
-                      <a:noFill/>
+                    <a:lnR w="12700" cap="flat" cmpd="sng" algn="ctr">
+                      <a:solidFill>
+                        <a:srgbClr val="909090"/>
+                      </a:solidFill>
+                      <a:prstDash val="solid"/>
+                      <a:round/>
+                      <a:headEnd type="none" w="med" len="med"/>
+                      <a:tailEnd type="none" w="med" len="med"/>
                     </a:lnR>
                     <a:lnT w="12700" cap="flat" cmpd="sng" algn="ctr">
                       <a:solidFill>
@@ -2713,8 +3133,14 @@
                       <a:headEnd type="none" w="med" len="med"/>
                       <a:tailEnd type="none" w="med" len="med"/>
                     </a:lnT>
-                    <a:lnB w="0" cap="flat" cmpd="sng" algn="ctr">
-                      <a:noFill/>
+                    <a:lnB w="12700" cap="flat" cmpd="sng" algn="ctr">
+                      <a:solidFill>
+                        <a:srgbClr val="909090"/>
+                      </a:solidFill>
+                      <a:prstDash val="solid"/>
+                      <a:round/>
+                      <a:headEnd type="none" w="med" len="med"/>
+                      <a:tailEnd type="none" w="med" len="med"/>
                     </a:lnB>
                   </a:tcPr>
                 </a:tc>
@@ -2745,11 +3171,23 @@
                     </a:p>
                   </a:txBody>
                   <a:tcPr marL="0" marR="0" marT="0" marB="0" anchor="ctr">
-                    <a:lnL w="0" cap="flat" cmpd="sng" algn="ctr">
-                      <a:noFill/>
+                    <a:lnL w="12700" cap="flat" cmpd="sng" algn="ctr">
+                      <a:solidFill>
+                        <a:srgbClr val="909090"/>
+                      </a:solidFill>
+                      <a:prstDash val="solid"/>
+                      <a:round/>
+                      <a:headEnd type="none" w="med" len="med"/>
+                      <a:tailEnd type="none" w="med" len="med"/>
                     </a:lnL>
-                    <a:lnR w="0" cap="flat" cmpd="sng" algn="ctr">
-                      <a:noFill/>
+                    <a:lnR w="12700" cap="flat" cmpd="sng" algn="ctr">
+                      <a:solidFill>
+                        <a:srgbClr val="909090"/>
+                      </a:solidFill>
+                      <a:prstDash val="solid"/>
+                      <a:round/>
+                      <a:headEnd type="none" w="med" len="med"/>
+                      <a:tailEnd type="none" w="med" len="med"/>
                     </a:lnR>
                     <a:lnT w="12700" cap="flat" cmpd="sng" algn="ctr">
                       <a:solidFill>
@@ -2760,8 +3198,14 @@
                       <a:headEnd type="none" w="med" len="med"/>
                       <a:tailEnd type="none" w="med" len="med"/>
                     </a:lnT>
-                    <a:lnB w="0" cap="flat" cmpd="sng" algn="ctr">
-                      <a:noFill/>
+                    <a:lnB w="12700" cap="flat" cmpd="sng" algn="ctr">
+                      <a:solidFill>
+                        <a:srgbClr val="909090"/>
+                      </a:solidFill>
+                      <a:prstDash val="solid"/>
+                      <a:round/>
+                      <a:headEnd type="none" w="med" len="med"/>
+                      <a:tailEnd type="none" w="med" len="med"/>
                     </a:lnB>
                   </a:tcPr>
                 </a:tc>
@@ -2794,11 +3238,23 @@
                     </a:p>
                   </a:txBody>
                   <a:tcPr marL="0" marR="0" marT="0" marB="0" anchor="ctr">
-                    <a:lnL w="0" cap="flat" cmpd="sng" algn="ctr">
-                      <a:noFill/>
+                    <a:lnL w="12700" cap="flat" cmpd="sng" algn="ctr">
+                      <a:solidFill>
+                        <a:srgbClr val="909090"/>
+                      </a:solidFill>
+                      <a:prstDash val="solid"/>
+                      <a:round/>
+                      <a:headEnd type="none" w="med" len="med"/>
+                      <a:tailEnd type="none" w="med" len="med"/>
                     </a:lnL>
-                    <a:lnR w="0" cap="flat" cmpd="sng" algn="ctr">
-                      <a:noFill/>
+                    <a:lnR w="12700" cap="flat" cmpd="sng" algn="ctr">
+                      <a:solidFill>
+                        <a:srgbClr val="909090"/>
+                      </a:solidFill>
+                      <a:prstDash val="solid"/>
+                      <a:round/>
+                      <a:headEnd type="none" w="med" len="med"/>
+                      <a:tailEnd type="none" w="med" len="med"/>
                     </a:lnR>
                     <a:lnT w="12700" cap="flat" cmpd="sng" algn="ctr">
                       <a:solidFill>
@@ -2809,8 +3265,14 @@
                       <a:headEnd type="none" w="med" len="med"/>
                       <a:tailEnd type="none" w="med" len="med"/>
                     </a:lnT>
-                    <a:lnB w="0" cap="flat" cmpd="sng" algn="ctr">
-                      <a:noFill/>
+                    <a:lnB w="12700" cap="flat" cmpd="sng" algn="ctr">
+                      <a:solidFill>
+                        <a:srgbClr val="909090"/>
+                      </a:solidFill>
+                      <a:prstDash val="solid"/>
+                      <a:round/>
+                      <a:headEnd type="none" w="med" len="med"/>
+                      <a:tailEnd type="none" w="med" len="med"/>
                     </a:lnB>
                   </a:tcPr>
                 </a:tc>
@@ -2841,11 +3303,23 @@
                     </a:p>
                   </a:txBody>
                   <a:tcPr marL="0" marR="0" marT="0" marB="0" anchor="ctr">
-                    <a:lnL w="0" cap="flat" cmpd="sng" algn="ctr">
-                      <a:noFill/>
+                    <a:lnL w="12700" cap="flat" cmpd="sng" algn="ctr">
+                      <a:solidFill>
+                        <a:srgbClr val="909090"/>
+                      </a:solidFill>
+                      <a:prstDash val="solid"/>
+                      <a:round/>
+                      <a:headEnd type="none" w="med" len="med"/>
+                      <a:tailEnd type="none" w="med" len="med"/>
                     </a:lnL>
-                    <a:lnR w="0" cap="flat" cmpd="sng" algn="ctr">
-                      <a:noFill/>
+                    <a:lnR w="12700" cap="flat" cmpd="sng" algn="ctr">
+                      <a:solidFill>
+                        <a:srgbClr val="909090"/>
+                      </a:solidFill>
+                      <a:prstDash val="solid"/>
+                      <a:round/>
+                      <a:headEnd type="none" w="med" len="med"/>
+                      <a:tailEnd type="none" w="med" len="med"/>
                     </a:lnR>
                     <a:lnT w="12700" cap="flat" cmpd="sng" algn="ctr">
                       <a:solidFill>
@@ -2856,8 +3330,14 @@
                       <a:headEnd type="none" w="med" len="med"/>
                       <a:tailEnd type="none" w="med" len="med"/>
                     </a:lnT>
-                    <a:lnB w="0" cap="flat" cmpd="sng" algn="ctr">
-                      <a:noFill/>
+                    <a:lnB w="12700" cap="flat" cmpd="sng" algn="ctr">
+                      <a:solidFill>
+                        <a:srgbClr val="909090"/>
+                      </a:solidFill>
+                      <a:prstDash val="solid"/>
+                      <a:round/>
+                      <a:headEnd type="none" w="med" len="med"/>
+                      <a:tailEnd type="none" w="med" len="med"/>
                     </a:lnB>
                   </a:tcPr>
                 </a:tc>
@@ -2888,11 +3368,23 @@
                     </a:p>
                   </a:txBody>
                   <a:tcPr marL="0" marR="0" marT="0" marB="0" anchor="ctr">
-                    <a:lnL w="0" cap="flat" cmpd="sng" algn="ctr">
-                      <a:noFill/>
+                    <a:lnL w="12700" cap="flat" cmpd="sng" algn="ctr">
+                      <a:solidFill>
+                        <a:srgbClr val="909090"/>
+                      </a:solidFill>
+                      <a:prstDash val="solid"/>
+                      <a:round/>
+                      <a:headEnd type="none" w="med" len="med"/>
+                      <a:tailEnd type="none" w="med" len="med"/>
                     </a:lnL>
-                    <a:lnR w="0" cap="flat" cmpd="sng" algn="ctr">
-                      <a:noFill/>
+                    <a:lnR w="12700" cap="flat" cmpd="sng" algn="ctr">
+                      <a:solidFill>
+                        <a:srgbClr val="909090"/>
+                      </a:solidFill>
+                      <a:prstDash val="solid"/>
+                      <a:round/>
+                      <a:headEnd type="none" w="med" len="med"/>
+                      <a:tailEnd type="none" w="med" len="med"/>
                     </a:lnR>
                     <a:lnT w="12700" cap="flat" cmpd="sng" algn="ctr">
                       <a:solidFill>
@@ -2903,8 +3395,14 @@
                       <a:headEnd type="none" w="med" len="med"/>
                       <a:tailEnd type="none" w="med" len="med"/>
                     </a:lnT>
-                    <a:lnB w="0" cap="flat" cmpd="sng" algn="ctr">
-                      <a:noFill/>
+                    <a:lnB w="12700" cap="flat" cmpd="sng" algn="ctr">
+                      <a:solidFill>
+                        <a:srgbClr val="909090"/>
+                      </a:solidFill>
+                      <a:prstDash val="solid"/>
+                      <a:round/>
+                      <a:headEnd type="none" w="med" len="med"/>
+                      <a:tailEnd type="none" w="med" len="med"/>
                     </a:lnB>
                   </a:tcPr>
                 </a:tc>
@@ -2937,11 +3435,23 @@
                     </a:p>
                   </a:txBody>
                   <a:tcPr marL="0" marR="0" marT="0" marB="0" anchor="ctr">
-                    <a:lnL w="0" cap="flat" cmpd="sng" algn="ctr">
-                      <a:noFill/>
+                    <a:lnL w="12700" cap="flat" cmpd="sng" algn="ctr">
+                      <a:solidFill>
+                        <a:srgbClr val="909090"/>
+                      </a:solidFill>
+                      <a:prstDash val="solid"/>
+                      <a:round/>
+                      <a:headEnd type="none" w="med" len="med"/>
+                      <a:tailEnd type="none" w="med" len="med"/>
                     </a:lnL>
-                    <a:lnR w="0" cap="flat" cmpd="sng" algn="ctr">
-                      <a:noFill/>
+                    <a:lnR w="12700" cap="flat" cmpd="sng" algn="ctr">
+                      <a:solidFill>
+                        <a:srgbClr val="909090"/>
+                      </a:solidFill>
+                      <a:prstDash val="solid"/>
+                      <a:round/>
+                      <a:headEnd type="none" w="med" len="med"/>
+                      <a:tailEnd type="none" w="med" len="med"/>
                     </a:lnR>
                     <a:lnT w="12700" cap="flat" cmpd="sng" algn="ctr">
                       <a:solidFill>
@@ -2952,8 +3462,14 @@
                       <a:headEnd type="none" w="med" len="med"/>
                       <a:tailEnd type="none" w="med" len="med"/>
                     </a:lnT>
-                    <a:lnB w="0" cap="flat" cmpd="sng" algn="ctr">
-                      <a:noFill/>
+                    <a:lnB w="12700" cap="flat" cmpd="sng" algn="ctr">
+                      <a:solidFill>
+                        <a:srgbClr val="909090"/>
+                      </a:solidFill>
+                      <a:prstDash val="solid"/>
+                      <a:round/>
+                      <a:headEnd type="none" w="med" len="med"/>
+                      <a:tailEnd type="none" w="med" len="med"/>
                     </a:lnB>
                   </a:tcPr>
                 </a:tc>
@@ -2984,11 +3500,23 @@
                     </a:p>
                   </a:txBody>
                   <a:tcPr marL="0" marR="0" marT="0" marB="0" anchor="ctr">
-                    <a:lnL w="0" cap="flat" cmpd="sng" algn="ctr">
-                      <a:noFill/>
+                    <a:lnL w="12700" cap="flat" cmpd="sng" algn="ctr">
+                      <a:solidFill>
+                        <a:srgbClr val="909090"/>
+                      </a:solidFill>
+                      <a:prstDash val="solid"/>
+                      <a:round/>
+                      <a:headEnd type="none" w="med" len="med"/>
+                      <a:tailEnd type="none" w="med" len="med"/>
                     </a:lnL>
-                    <a:lnR w="0" cap="flat" cmpd="sng" algn="ctr">
-                      <a:noFill/>
+                    <a:lnR w="12700" cap="flat" cmpd="sng" algn="ctr">
+                      <a:solidFill>
+                        <a:srgbClr val="909090"/>
+                      </a:solidFill>
+                      <a:prstDash val="solid"/>
+                      <a:round/>
+                      <a:headEnd type="none" w="med" len="med"/>
+                      <a:tailEnd type="none" w="med" len="med"/>
                     </a:lnR>
                     <a:lnT w="12700" cap="flat" cmpd="sng" algn="ctr">
                       <a:solidFill>
@@ -2999,8 +3527,14 @@
                       <a:headEnd type="none" w="med" len="med"/>
                       <a:tailEnd type="none" w="med" len="med"/>
                     </a:lnT>
-                    <a:lnB w="0" cap="flat" cmpd="sng" algn="ctr">
-                      <a:noFill/>
+                    <a:lnB w="12700" cap="flat" cmpd="sng" algn="ctr">
+                      <a:solidFill>
+                        <a:srgbClr val="909090"/>
+                      </a:solidFill>
+                      <a:prstDash val="solid"/>
+                      <a:round/>
+                      <a:headEnd type="none" w="med" len="med"/>
+                      <a:tailEnd type="none" w="med" len="med"/>
                     </a:lnB>
                   </a:tcPr>
                 </a:tc>
@@ -3031,11 +3565,23 @@
                     </a:p>
                   </a:txBody>
                   <a:tcPr marL="0" marR="0" marT="0" marB="0" anchor="ctr">
-                    <a:lnL w="0" cap="flat" cmpd="sng" algn="ctr">
-                      <a:noFill/>
+                    <a:lnL w="12700" cap="flat" cmpd="sng" algn="ctr">
+                      <a:solidFill>
+                        <a:srgbClr val="909090"/>
+                      </a:solidFill>
+                      <a:prstDash val="solid"/>
+                      <a:round/>
+                      <a:headEnd type="none" w="med" len="med"/>
+                      <a:tailEnd type="none" w="med" len="med"/>
                     </a:lnL>
-                    <a:lnR w="0" cap="flat" cmpd="sng" algn="ctr">
-                      <a:noFill/>
+                    <a:lnR w="12700" cap="flat" cmpd="sng" algn="ctr">
+                      <a:solidFill>
+                        <a:srgbClr val="909090"/>
+                      </a:solidFill>
+                      <a:prstDash val="solid"/>
+                      <a:round/>
+                      <a:headEnd type="none" w="med" len="med"/>
+                      <a:tailEnd type="none" w="med" len="med"/>
                     </a:lnR>
                     <a:lnT w="12700" cap="flat" cmpd="sng" algn="ctr">
                       <a:solidFill>
@@ -3046,8 +3592,14 @@
                       <a:headEnd type="none" w="med" len="med"/>
                       <a:tailEnd type="none" w="med" len="med"/>
                     </a:lnT>
-                    <a:lnB w="0" cap="flat" cmpd="sng" algn="ctr">
-                      <a:noFill/>
+                    <a:lnB w="12700" cap="flat" cmpd="sng" algn="ctr">
+                      <a:solidFill>
+                        <a:srgbClr val="909090"/>
+                      </a:solidFill>
+                      <a:prstDash val="solid"/>
+                      <a:round/>
+                      <a:headEnd type="none" w="med" len="med"/>
+                      <a:tailEnd type="none" w="med" len="med"/>
                     </a:lnB>
                   </a:tcPr>
                 </a:tc>
